--- a/outputs/Muhammad_Ali_Akbar_Al-Qahri_Portfolio_Minimal.pptx
+++ b/outputs/Muhammad_Ali_Akbar_Al-Qahri_Portfolio_Minimal.pptx
@@ -5215,7 +5215,7 @@
                 <a:ea typeface="Aptos"/>
                 <a:cs typeface="Aptos"/>
               </a:rPr>
-              <a:t>Available for data analyst, business intelligence, data science, and data engineering opportunities.</a:t>
+              <a:t>Available for data &amp; AI engineering, analytics, BI, and data science opportunities.</a:t>
             </a:r>
           </a:p>
         </p:txBody>
@@ -8718,7 +8718,7 @@
         <p:spPr>
           <a:xfrm xmlns:a="http://schemas.openxmlformats.org/drawingml/2006/main">
             <a:off x="400050" y="2238375"/>
-            <a:ext cx="2476500" cy="285750"/>
+            <a:ext cx="2130552" cy="285750"/>
           </a:xfrm>
           <a:prstGeom xmlns:a="http://schemas.openxmlformats.org/drawingml/2006/main" prst="rect">
             <a:avLst/>
@@ -8772,7 +8772,7 @@
         <p:spPr>
           <a:xfrm xmlns:a="http://schemas.openxmlformats.org/drawingml/2006/main">
             <a:off x="400050" y="3343275"/>
-            <a:ext cx="2400300" cy="552450"/>
+            <a:ext cx="2130552" cy="552450"/>
           </a:xfrm>
           <a:prstGeom xmlns:a="http://schemas.openxmlformats.org/drawingml/2006/main" prst="rect">
             <a:avLst/>
@@ -8826,7 +8826,7 @@
         <p:spPr>
           <a:xfrm xmlns:a="http://schemas.openxmlformats.org/drawingml/2006/main">
             <a:off x="400050" y="3971925"/>
-            <a:ext cx="2381250" cy="466725"/>
+            <a:ext cx="2130552" cy="466725"/>
           </a:xfrm>
           <a:prstGeom xmlns:a="http://schemas.openxmlformats.org/drawingml/2006/main" prst="rect">
             <a:avLst/>
@@ -8880,7 +8880,7 @@
         <p:spPr>
           <a:xfrm xmlns:a="http://schemas.openxmlformats.org/drawingml/2006/main">
             <a:off x="400050" y="4695825"/>
-            <a:ext cx="2400300" cy="552450"/>
+            <a:ext cx="2130552" cy="822960"/>
           </a:xfrm>
           <a:prstGeom xmlns:a="http://schemas.openxmlformats.org/drawingml/2006/main" prst="rect">
             <a:avLst/>
@@ -8933,7 +8933,7 @@
         </p:nvSpPr>
         <p:spPr>
           <a:xfrm xmlns:a="http://schemas.openxmlformats.org/drawingml/2006/main">
-            <a:off x="3400425" y="2714625"/>
+            <a:off x="2856357" y="2714625"/>
             <a:ext cx="361950" cy="361950"/>
           </a:xfrm>
           <a:prstGeom xmlns:a="http://schemas.openxmlformats.org/drawingml/2006/main" prst="roundRect">
@@ -8968,7 +8968,7 @@
         </p:nvSpPr>
         <p:spPr>
           <a:xfrm xmlns:a="http://schemas.openxmlformats.org/drawingml/2006/main">
-            <a:off x="3524250" y="2838450"/>
+            <a:off x="2980182" y="2838450"/>
             <a:ext cx="114300" cy="114300"/>
           </a:xfrm>
           <a:prstGeom xmlns:a="http://schemas.openxmlformats.org/drawingml/2006/main" prst="roundRect">
@@ -9003,8 +9003,8 @@
         </p:nvSpPr>
         <p:spPr>
           <a:xfrm xmlns:a="http://schemas.openxmlformats.org/drawingml/2006/main">
-            <a:off x="3257550" y="2238375"/>
-            <a:ext cx="2476500" cy="285750"/>
+            <a:off x="2713482" y="2238375"/>
+            <a:ext cx="2130552" cy="285750"/>
           </a:xfrm>
           <a:prstGeom xmlns:a="http://schemas.openxmlformats.org/drawingml/2006/main" prst="rect">
             <a:avLst/>
@@ -9057,8 +9057,8 @@
         </p:nvSpPr>
         <p:spPr>
           <a:xfrm xmlns:a="http://schemas.openxmlformats.org/drawingml/2006/main">
-            <a:off x="3257550" y="3343275"/>
-            <a:ext cx="2400300" cy="552450"/>
+            <a:off x="2713482" y="3343275"/>
+            <a:ext cx="2130552" cy="552450"/>
           </a:xfrm>
           <a:prstGeom xmlns:a="http://schemas.openxmlformats.org/drawingml/2006/main" prst="rect">
             <a:avLst/>
@@ -9111,8 +9111,8 @@
         </p:nvSpPr>
         <p:spPr>
           <a:xfrm xmlns:a="http://schemas.openxmlformats.org/drawingml/2006/main">
-            <a:off x="3257550" y="3971925"/>
-            <a:ext cx="2381250" cy="466725"/>
+            <a:off x="2713482" y="3971925"/>
+            <a:ext cx="2130552" cy="466725"/>
           </a:xfrm>
           <a:prstGeom xmlns:a="http://schemas.openxmlformats.org/drawingml/2006/main" prst="rect">
             <a:avLst/>
@@ -9165,8 +9165,8 @@
         </p:nvSpPr>
         <p:spPr>
           <a:xfrm xmlns:a="http://schemas.openxmlformats.org/drawingml/2006/main">
-            <a:off x="3257550" y="4695825"/>
-            <a:ext cx="2400300" cy="552450"/>
+            <a:off x="2713482" y="4695825"/>
+            <a:ext cx="2130552" cy="822960"/>
           </a:xfrm>
           <a:prstGeom xmlns:a="http://schemas.openxmlformats.org/drawingml/2006/main" prst="rect">
             <a:avLst/>
@@ -9219,7 +9219,7 @@
         </p:nvSpPr>
         <p:spPr>
           <a:xfrm xmlns:a="http://schemas.openxmlformats.org/drawingml/2006/main">
-            <a:off x="6257925" y="2714625"/>
+            <a:off x="5169789" y="2714625"/>
             <a:ext cx="361950" cy="361950"/>
           </a:xfrm>
           <a:prstGeom xmlns:a="http://schemas.openxmlformats.org/drawingml/2006/main" prst="roundRect">
@@ -9254,7 +9254,7 @@
         </p:nvSpPr>
         <p:spPr>
           <a:xfrm xmlns:a="http://schemas.openxmlformats.org/drawingml/2006/main">
-            <a:off x="6381750" y="2838450"/>
+            <a:off x="5293614" y="2838450"/>
             <a:ext cx="114300" cy="114300"/>
           </a:xfrm>
           <a:prstGeom xmlns:a="http://schemas.openxmlformats.org/drawingml/2006/main" prst="roundRect">
@@ -9289,8 +9289,8 @@
         </p:nvSpPr>
         <p:spPr>
           <a:xfrm xmlns:a="http://schemas.openxmlformats.org/drawingml/2006/main">
-            <a:off x="6115050" y="2238375"/>
-            <a:ext cx="2476500" cy="285750"/>
+            <a:off x="5026914" y="2238375"/>
+            <a:ext cx="2130552" cy="285750"/>
           </a:xfrm>
           <a:prstGeom xmlns:a="http://schemas.openxmlformats.org/drawingml/2006/main" prst="rect">
             <a:avLst/>
@@ -9343,8 +9343,8 @@
         </p:nvSpPr>
         <p:spPr>
           <a:xfrm xmlns:a="http://schemas.openxmlformats.org/drawingml/2006/main">
-            <a:off x="6115050" y="3343275"/>
-            <a:ext cx="2400300" cy="552450"/>
+            <a:off x="5026914" y="3343275"/>
+            <a:ext cx="2130552" cy="552450"/>
           </a:xfrm>
           <a:prstGeom xmlns:a="http://schemas.openxmlformats.org/drawingml/2006/main" prst="rect">
             <a:avLst/>
@@ -9397,8 +9397,8 @@
         </p:nvSpPr>
         <p:spPr>
           <a:xfrm xmlns:a="http://schemas.openxmlformats.org/drawingml/2006/main">
-            <a:off x="6115050" y="3971925"/>
-            <a:ext cx="2381250" cy="466725"/>
+            <a:off x="5026914" y="3971925"/>
+            <a:ext cx="2130552" cy="466725"/>
           </a:xfrm>
           <a:prstGeom xmlns:a="http://schemas.openxmlformats.org/drawingml/2006/main" prst="rect">
             <a:avLst/>
@@ -9451,8 +9451,8 @@
         </p:nvSpPr>
         <p:spPr>
           <a:xfrm xmlns:a="http://schemas.openxmlformats.org/drawingml/2006/main">
-            <a:off x="6115050" y="4695825"/>
-            <a:ext cx="2400300" cy="552450"/>
+            <a:off x="5026914" y="4695825"/>
+            <a:ext cx="2130552" cy="822960"/>
           </a:xfrm>
           <a:prstGeom xmlns:a="http://schemas.openxmlformats.org/drawingml/2006/main" prst="rect">
             <a:avLst/>
@@ -9505,7 +9505,7 @@
         </p:nvSpPr>
         <p:spPr>
           <a:xfrm xmlns:a="http://schemas.openxmlformats.org/drawingml/2006/main">
-            <a:off x="9115425" y="2714625"/>
+            <a:off x="7483221" y="2714625"/>
             <a:ext cx="361950" cy="361950"/>
           </a:xfrm>
           <a:prstGeom xmlns:a="http://schemas.openxmlformats.org/drawingml/2006/main" prst="roundRect">
@@ -9540,7 +9540,7 @@
         </p:nvSpPr>
         <p:spPr>
           <a:xfrm xmlns:a="http://schemas.openxmlformats.org/drawingml/2006/main">
-            <a:off x="9239250" y="2838450"/>
+            <a:off x="7607046" y="2838450"/>
             <a:ext cx="114300" cy="114300"/>
           </a:xfrm>
           <a:prstGeom xmlns:a="http://schemas.openxmlformats.org/drawingml/2006/main" prst="roundRect">
@@ -9575,8 +9575,8 @@
         </p:nvSpPr>
         <p:spPr>
           <a:xfrm xmlns:a="http://schemas.openxmlformats.org/drawingml/2006/main">
-            <a:off x="8972550" y="2238375"/>
-            <a:ext cx="2476500" cy="285750"/>
+            <a:off x="7340346" y="2238375"/>
+            <a:ext cx="2130552" cy="285750"/>
           </a:xfrm>
           <a:prstGeom xmlns:a="http://schemas.openxmlformats.org/drawingml/2006/main" prst="rect">
             <a:avLst/>
@@ -9629,8 +9629,8 @@
         </p:nvSpPr>
         <p:spPr>
           <a:xfrm xmlns:a="http://schemas.openxmlformats.org/drawingml/2006/main">
-            <a:off x="8972550" y="3343275"/>
-            <a:ext cx="2400300" cy="552450"/>
+            <a:off x="7340346" y="3343275"/>
+            <a:ext cx="2130552" cy="552450"/>
           </a:xfrm>
           <a:prstGeom xmlns:a="http://schemas.openxmlformats.org/drawingml/2006/main" prst="rect">
             <a:avLst/>
@@ -9683,8 +9683,8 @@
         </p:nvSpPr>
         <p:spPr>
           <a:xfrm xmlns:a="http://schemas.openxmlformats.org/drawingml/2006/main">
-            <a:off x="8972550" y="3971925"/>
-            <a:ext cx="2381250" cy="466725"/>
+            <a:off x="7340346" y="3971925"/>
+            <a:ext cx="2130552" cy="466725"/>
           </a:xfrm>
           <a:prstGeom xmlns:a="http://schemas.openxmlformats.org/drawingml/2006/main" prst="rect">
             <a:avLst/>
@@ -9716,7 +9716,7 @@
                 <a:ea typeface="Aptos"/>
                 <a:cs typeface="Aptos"/>
               </a:rPr>
-              <a:t>Data Intelligence</a:t>
+              <a:t>Data Analyst</a:t>
             </a:r>
           </a:p>
         </p:txBody>
@@ -9737,8 +9737,8 @@
         </p:nvSpPr>
         <p:spPr>
           <a:xfrm xmlns:a="http://schemas.openxmlformats.org/drawingml/2006/main">
-            <a:off x="8972550" y="4695825"/>
-            <a:ext cx="2400300" cy="552450"/>
+            <a:off x="7340346" y="4695825"/>
+            <a:ext cx="2130552" cy="822960"/>
           </a:xfrm>
           <a:prstGeom xmlns:a="http://schemas.openxmlformats.org/drawingml/2006/main" prst="rect">
             <a:avLst/>
@@ -9770,7 +9770,293 @@
                 <a:ea typeface="Aptos"/>
                 <a:cs typeface="Aptos"/>
               </a:rPr>
-              <a:t>Analytics · forecasting · internal systems</a:t>
+              <a:t>Prophet forecasting · Power BI KPI dashboards</a:t>
+            </a:r>
+          </a:p>
+        </p:txBody>
+      </p:sp>
+      <p:sp>
+        <p:nvSpPr>
+          <p:cNvPr id="38" name="timeline-dot-4">
+            <a:extLst xmlns:a="http://schemas.openxmlformats.org/drawingml/2006/main">
+              <a:ext uri="{FF2B5EF4-FFF2-40B4-BE49-F238E27FC236}">
+                <a16:creationId xmlns:a16="http://schemas.microsoft.com/office/drawing/2014/main" id="{08A936D8-E56A-473A-B0E5-A13F7DD18723}"/>
+              </a:ext>
+            </a:extLst>
+          </p:cNvPr>
+          <p:cNvSpPr>
+            <a:spLocks xmlns:a="http://schemas.openxmlformats.org/drawingml/2006/main" noGrp="1"/>
+          </p:cNvSpPr>
+          <p:nvPr/>
+        </p:nvSpPr>
+        <p:spPr>
+          <a:xfrm xmlns:a="http://schemas.openxmlformats.org/drawingml/2006/main">
+            <a:off x="9796653" y="2714625"/>
+            <a:ext cx="361950" cy="361950"/>
+          </a:xfrm>
+          <a:prstGeom xmlns:a="http://schemas.openxmlformats.org/drawingml/2006/main" prst="roundRect">
+            <a:avLst>
+              <a:gd name="adj" fmla="val 21053"/>
+            </a:avLst>
+          </a:prstGeom>
+          <a:solidFill xmlns:a="http://schemas.openxmlformats.org/drawingml/2006/main">
+            <a:srgbClr val="FF755B"/>
+          </a:solidFill>
+          <a:ln xmlns:a="http://schemas.openxmlformats.org/drawingml/2006/main" w="0">
+            <a:solidFill>
+              <a:srgbClr val="FF755B"/>
+            </a:solidFill>
+            <a:prstDash val="solid"/>
+          </a:ln>
+        </p:spPr>
+      </p:sp>
+      <p:sp>
+        <p:nvSpPr>
+          <p:cNvPr id="39" name="timeline-dot-core-4">
+            <a:extLst xmlns:a="http://schemas.openxmlformats.org/drawingml/2006/main">
+              <a:ext uri="{FF2B5EF4-FFF2-40B4-BE49-F238E27FC236}">
+                <a16:creationId xmlns:a16="http://schemas.microsoft.com/office/drawing/2014/main" id="{F14691AB-90AB-43A7-9528-A60AB6669744}"/>
+              </a:ext>
+            </a:extLst>
+          </p:cNvPr>
+          <p:cNvSpPr>
+            <a:spLocks xmlns:a="http://schemas.openxmlformats.org/drawingml/2006/main" noGrp="1"/>
+          </p:cNvSpPr>
+          <p:nvPr/>
+        </p:nvSpPr>
+        <p:spPr>
+          <a:xfrm xmlns:a="http://schemas.openxmlformats.org/drawingml/2006/main">
+            <a:off x="9920478" y="2838450"/>
+            <a:ext cx="114300" cy="114300"/>
+          </a:xfrm>
+          <a:prstGeom xmlns:a="http://schemas.openxmlformats.org/drawingml/2006/main" prst="roundRect">
+            <a:avLst>
+              <a:gd name="adj" fmla="val 50000"/>
+            </a:avLst>
+          </a:prstGeom>
+          <a:solidFill xmlns:a="http://schemas.openxmlformats.org/drawingml/2006/main">
+            <a:srgbClr val="F5C451"/>
+          </a:solidFill>
+          <a:ln xmlns:a="http://schemas.openxmlformats.org/drawingml/2006/main" w="0">
+            <a:solidFill>
+              <a:srgbClr val="F5C451"/>
+            </a:solidFill>
+            <a:prstDash val="solid"/>
+          </a:ln>
+        </p:spPr>
+      </p:sp>
+      <p:sp>
+        <p:nvSpPr>
+          <p:cNvPr id="40" name="timeline-period-4">
+            <a:extLst xmlns:a="http://schemas.openxmlformats.org/drawingml/2006/main">
+              <a:ext uri="{FF2B5EF4-FFF2-40B4-BE49-F238E27FC236}">
+                <a16:creationId xmlns:a16="http://schemas.microsoft.com/office/drawing/2014/main" id="{099E6B45-21D6-4406-B220-F31C4A76F35B}"/>
+              </a:ext>
+            </a:extLst>
+          </p:cNvPr>
+          <p:cNvSpPr>
+            <a:spLocks xmlns:a="http://schemas.openxmlformats.org/drawingml/2006/main" noGrp="1"/>
+          </p:cNvSpPr>
+          <p:nvPr/>
+        </p:nvSpPr>
+        <p:spPr>
+          <a:xfrm xmlns:a="http://schemas.openxmlformats.org/drawingml/2006/main">
+            <a:off x="9653778" y="2238375"/>
+            <a:ext cx="2130552" cy="285750"/>
+          </a:xfrm>
+          <a:prstGeom xmlns:a="http://schemas.openxmlformats.org/drawingml/2006/main" prst="rect">
+            <a:avLst/>
+          </a:prstGeom>
+        </p:spPr>
+        <p:txBody>
+          <a:bodyPr xmlns:a="http://schemas.openxmlformats.org/drawingml/2006/main" wrap="square" lIns="0" tIns="0" rIns="0" bIns="0" anchor="t">
+            <a:normAutofit fontScale="100000"/>
+          </a:bodyPr>
+          <a:lstStyle xmlns:a="http://schemas.openxmlformats.org/drawingml/2006/main"/>
+          <a:p xmlns:a="http://schemas.openxmlformats.org/drawingml/2006/main">
+            <a:pPr algn="l">
+              <a:buNone/>
+              <a:defRPr sz="975" b="1">
+                <a:solidFill>
+                  <a:srgbClr val="211B18"/>
+                </a:solidFill>
+                <a:latin typeface="Aptos"/>
+                <a:ea typeface="Aptos"/>
+                <a:cs typeface="Aptos"/>
+              </a:defRPr>
+            </a:pPr>
+            <a:r>
+              <a:rPr sz="975" b="1">
+                <a:solidFill>
+                  <a:srgbClr val="211B18"/>
+                </a:solidFill>
+                <a:latin typeface="Aptos"/>
+                <a:ea typeface="Aptos"/>
+                <a:cs typeface="Aptos"/>
+              </a:rPr>
+              <a:t>2026-now</a:t>
+            </a:r>
+          </a:p>
+        </p:txBody>
+      </p:sp>
+      <p:sp>
+        <p:nvSpPr>
+          <p:cNvPr id="41" name="timeline-org-4">
+            <a:extLst xmlns:a="http://schemas.openxmlformats.org/drawingml/2006/main">
+              <a:ext uri="{FF2B5EF4-FFF2-40B4-BE49-F238E27FC236}">
+                <a16:creationId xmlns:a16="http://schemas.microsoft.com/office/drawing/2014/main" id="{FE5C299F-0FF4-432F-8238-1DFFC51F5FB7}"/>
+              </a:ext>
+            </a:extLst>
+          </p:cNvPr>
+          <p:cNvSpPr>
+            <a:spLocks xmlns:a="http://schemas.openxmlformats.org/drawingml/2006/main" noGrp="1"/>
+          </p:cNvSpPr>
+          <p:nvPr/>
+        </p:nvSpPr>
+        <p:spPr>
+          <a:xfrm xmlns:a="http://schemas.openxmlformats.org/drawingml/2006/main">
+            <a:off x="9653778" y="3343275"/>
+            <a:ext cx="2130552" cy="552450"/>
+          </a:xfrm>
+          <a:prstGeom xmlns:a="http://schemas.openxmlformats.org/drawingml/2006/main" prst="rect">
+            <a:avLst/>
+          </a:prstGeom>
+        </p:spPr>
+        <p:txBody>
+          <a:bodyPr xmlns:a="http://schemas.openxmlformats.org/drawingml/2006/main" wrap="square" lIns="0" tIns="0" rIns="0" bIns="0" anchor="t">
+            <a:normAutofit fontScale="100000"/>
+          </a:bodyPr>
+          <a:lstStyle xmlns:a="http://schemas.openxmlformats.org/drawingml/2006/main"/>
+          <a:p xmlns:a="http://schemas.openxmlformats.org/drawingml/2006/main">
+            <a:pPr algn="l">
+              <a:buNone/>
+              <a:defRPr sz="1575" b="1">
+                <a:solidFill>
+                  <a:srgbClr val="211B18"/>
+                </a:solidFill>
+                <a:latin typeface="Aptos"/>
+                <a:ea typeface="Aptos"/>
+                <a:cs typeface="Aptos"/>
+              </a:defRPr>
+            </a:pPr>
+            <a:r>
+              <a:rPr sz="1575" b="1">
+                <a:solidFill>
+                  <a:srgbClr val="211B18"/>
+                </a:solidFill>
+                <a:latin typeface="Aptos"/>
+                <a:ea typeface="Aptos"/>
+                <a:cs typeface="Aptos"/>
+              </a:rPr>
+              <a:t>Cerebrum</a:t>
+            </a:r>
+          </a:p>
+        </p:txBody>
+      </p:sp>
+      <p:sp>
+        <p:nvSpPr>
+          <p:cNvPr id="42" name="timeline-role-4">
+            <a:extLst xmlns:a="http://schemas.openxmlformats.org/drawingml/2006/main">
+              <a:ext uri="{FF2B5EF4-FFF2-40B4-BE49-F238E27FC236}">
+                <a16:creationId xmlns:a16="http://schemas.microsoft.com/office/drawing/2014/main" id="{D4BC5036-7790-4B14-B453-DA47C1EB99EC}"/>
+              </a:ext>
+            </a:extLst>
+          </p:cNvPr>
+          <p:cNvSpPr>
+            <a:spLocks xmlns:a="http://schemas.openxmlformats.org/drawingml/2006/main" noGrp="1"/>
+          </p:cNvSpPr>
+          <p:nvPr/>
+        </p:nvSpPr>
+        <p:spPr>
+          <a:xfrm xmlns:a="http://schemas.openxmlformats.org/drawingml/2006/main">
+            <a:off x="9653778" y="3971925"/>
+            <a:ext cx="2130552" cy="466725"/>
+          </a:xfrm>
+          <a:prstGeom xmlns:a="http://schemas.openxmlformats.org/drawingml/2006/main" prst="rect">
+            <a:avLst/>
+          </a:prstGeom>
+        </p:spPr>
+        <p:txBody>
+          <a:bodyPr xmlns:a="http://schemas.openxmlformats.org/drawingml/2006/main" wrap="square" lIns="0" tIns="0" rIns="0" bIns="0" anchor="t">
+            <a:normAutofit fontScale="100000"/>
+          </a:bodyPr>
+          <a:lstStyle xmlns:a="http://schemas.openxmlformats.org/drawingml/2006/main"/>
+          <a:p xmlns:a="http://schemas.openxmlformats.org/drawingml/2006/main">
+            <a:pPr algn="l">
+              <a:buNone/>
+              <a:defRPr sz="1200" b="0">
+                <a:solidFill>
+                  <a:srgbClr val="211B18"/>
+                </a:solidFill>
+                <a:latin typeface="Aptos"/>
+                <a:ea typeface="Aptos"/>
+                <a:cs typeface="Aptos"/>
+              </a:defRPr>
+            </a:pPr>
+            <a:r>
+              <a:rPr sz="1200" b="0">
+                <a:solidFill>
+                  <a:srgbClr val="211B18"/>
+                </a:solidFill>
+                <a:latin typeface="Aptos"/>
+                <a:ea typeface="Aptos"/>
+                <a:cs typeface="Aptos"/>
+              </a:rPr>
+              <a:t>Data &amp; AI Engineer</a:t>
+            </a:r>
+          </a:p>
+        </p:txBody>
+      </p:sp>
+      <p:sp>
+        <p:nvSpPr>
+          <p:cNvPr id="43" name="timeline-result-4">
+            <a:extLst xmlns:a="http://schemas.openxmlformats.org/drawingml/2006/main">
+              <a:ext uri="{FF2B5EF4-FFF2-40B4-BE49-F238E27FC236}">
+                <a16:creationId xmlns:a16="http://schemas.microsoft.com/office/drawing/2014/main" id="{D8653A0F-7E51-4393-885C-82F87296C709}"/>
+              </a:ext>
+            </a:extLst>
+          </p:cNvPr>
+          <p:cNvSpPr>
+            <a:spLocks xmlns:a="http://schemas.openxmlformats.org/drawingml/2006/main" noGrp="1"/>
+          </p:cNvSpPr>
+          <p:nvPr/>
+        </p:nvSpPr>
+        <p:spPr>
+          <a:xfrm xmlns:a="http://schemas.openxmlformats.org/drawingml/2006/main">
+            <a:off x="9653778" y="4695825"/>
+            <a:ext cx="2130552" cy="822960"/>
+          </a:xfrm>
+          <a:prstGeom xmlns:a="http://schemas.openxmlformats.org/drawingml/2006/main" prst="rect">
+            <a:avLst/>
+          </a:prstGeom>
+        </p:spPr>
+        <p:txBody>
+          <a:bodyPr xmlns:a="http://schemas.openxmlformats.org/drawingml/2006/main" wrap="square" lIns="0" tIns="0" rIns="0" bIns="0" anchor="t">
+            <a:normAutofit fontScale="100000"/>
+          </a:bodyPr>
+          <a:lstStyle xmlns:a="http://schemas.openxmlformats.org/drawingml/2006/main"/>
+          <a:p xmlns:a="http://schemas.openxmlformats.org/drawingml/2006/main">
+            <a:pPr algn="l">
+              <a:buNone/>
+              <a:defRPr sz="1125" b="1">
+                <a:solidFill>
+                  <a:srgbClr val="211B18"/>
+                </a:solidFill>
+                <a:latin typeface="Aptos"/>
+                <a:ea typeface="Aptos"/>
+                <a:cs typeface="Aptos"/>
+              </a:defRPr>
+            </a:pPr>
+            <a:r>
+              <a:rPr sz="1125" b="1">
+                <a:solidFill>
+                  <a:srgbClr val="211B18"/>
+                </a:solidFill>
+                <a:latin typeface="Aptos"/>
+                <a:ea typeface="Aptos"/>
+                <a:cs typeface="Aptos"/>
+              </a:rPr>
+              <a:t>33.5K+ questions auto-QC'd · LLM content pipelines</a:t>
             </a:r>
           </a:p>
         </p:txBody>
